--- a/tmp-tj/261028_tajplast_audit-reseaux-sociaux_v2.pptx
+++ b/tmp-tj/261028_tajplast_audit-reseaux-sociaux_v2.pptx
@@ -5557,7 +5557,7 @@
         <p:spPr>
           <a:xfrm>
             <a:off x="576000" y="1512000"/>
-            <a:ext cx="2556000" cy="2556000"/>
+            <a:ext cx="2412000" cy="2412000"/>
           </a:xfrm>
           <a:prstGeom prst="rect">
             <a:avLst/>
@@ -5580,8 +5580,8 @@
         </p:blipFill>
         <p:spPr>
           <a:xfrm>
-            <a:off x="4320000" y="1512000"/>
-            <a:ext cx="2556000" cy="2556000"/>
+            <a:off x="3168000" y="1512000"/>
+            <a:ext cx="2412000" cy="2412000"/>
           </a:xfrm>
           <a:prstGeom prst="rect">
             <a:avLst/>
@@ -5604,8 +5604,8 @@
         </p:blipFill>
         <p:spPr>
           <a:xfrm>
-            <a:off x="8064000" y="1512000"/>
-            <a:ext cx="2556000" cy="2556000"/>
+            <a:off x="5760000" y="1512000"/>
+            <a:ext cx="2412000" cy="2412000"/>
           </a:xfrm>
           <a:prstGeom prst="rect">
             <a:avLst/>
@@ -5628,8 +5628,8 @@
         </p:blipFill>
         <p:spPr>
           <a:xfrm>
-            <a:off x="576000" y="4176000"/>
-            <a:ext cx="2556000" cy="2556000"/>
+            <a:off x="576000" y="4104000"/>
+            <a:ext cx="2412000" cy="2412000"/>
           </a:xfrm>
           <a:prstGeom prst="rect">
             <a:avLst/>
@@ -5652,8 +5652,8 @@
         </p:blipFill>
         <p:spPr>
           <a:xfrm>
-            <a:off x="4320000" y="4176000"/>
-            <a:ext cx="2556000" cy="2556000"/>
+            <a:off x="3168000" y="4104000"/>
+            <a:ext cx="2412000" cy="2412000"/>
           </a:xfrm>
           <a:prstGeom prst="rect">
             <a:avLst/>
@@ -5676,8 +5676,8 @@
         </p:blipFill>
         <p:spPr>
           <a:xfrm>
-            <a:off x="8064000" y="4176000"/>
-            <a:ext cx="2556000" cy="2556000"/>
+            <a:off x="5760000" y="4104000"/>
+            <a:ext cx="2412000" cy="2412000"/>
           </a:xfrm>
           <a:prstGeom prst="rect">
             <a:avLst/>

--- a/tmp-tj/261028_tajplast_audit-reseaux-sociaux_v2.pptx
+++ b/tmp-tj/261028_tajplast_audit-reseaux-sociaux_v2.pptx
@@ -5374,7 +5374,7 @@
                 </a:solidFill>
                 <a:latin typeface="Arial"/>
               </a:rPr>
-              <a:t>AVANT / APRÈS · AVEC DES PERSONNES</a:t>
+              <a:t>AVANT / APRÈS · LE MIX</a:t>
             </a:r>
           </a:p>
         </p:txBody>
@@ -5413,7 +5413,7 @@
                 </a:solidFill>
                 <a:latin typeface="Arial"/>
               </a:rPr>
-              <a:t>Version 3 : vos clients au centre de l’image</a:t>
+              <a:t>Version 3 : un mix de scènes de vie et de produits en grand</a:t>
             </a:r>
           </a:p>
         </p:txBody>
@@ -5566,7 +5566,7 @@
       </p:pic>
       <p:pic>
         <p:nvPicPr>
-          <p:cNvPr id="11" name="Picture 10" descr="v3_panier.jpg"/>
+          <p:cNvPr id="11" name="Picture 10" descr="v2_panier.jpg"/>
           <p:cNvPicPr>
             <a:picLocks noChangeAspect="1"/>
           </p:cNvPicPr>
@@ -5580,8 +5580,8 @@
         </p:blipFill>
         <p:spPr>
           <a:xfrm>
-            <a:off x="3168000" y="1512000"/>
-            <a:ext cx="2412000" cy="2412000"/>
+            <a:off x="3409200" y="1512000"/>
+            <a:ext cx="1929600" cy="2412000"/>
           </a:xfrm>
           <a:prstGeom prst="rect">
             <a:avLst/>
@@ -5590,7 +5590,7 @@
       </p:pic>
       <p:pic>
         <p:nvPicPr>
-          <p:cNvPr id="12" name="Picture 11" descr="v3_abreuvoir.jpg"/>
+          <p:cNvPr id="12" name="Picture 11" descr="v2_abreuvoir.jpg"/>
           <p:cNvPicPr>
             <a:picLocks noChangeAspect="1"/>
           </p:cNvPicPr>
@@ -5604,8 +5604,8 @@
         </p:blipFill>
         <p:spPr>
           <a:xfrm>
-            <a:off x="5760000" y="1512000"/>
-            <a:ext cx="2412000" cy="2412000"/>
+            <a:off x="6001200" y="1512000"/>
+            <a:ext cx="1929600" cy="2412000"/>
           </a:xfrm>
           <a:prstGeom prst="rect">
             <a:avLst/>
@@ -5638,7 +5638,7 @@
       </p:pic>
       <p:pic>
         <p:nvPicPr>
-          <p:cNvPr id="14" name="Picture 13" descr="v3_ibiza.jpg"/>
+          <p:cNvPr id="14" name="Picture 13" descr="v2_ibiza.jpg"/>
           <p:cNvPicPr>
             <a:picLocks noChangeAspect="1"/>
           </p:cNvPicPr>
@@ -5652,8 +5652,8 @@
         </p:blipFill>
         <p:spPr>
           <a:xfrm>
-            <a:off x="3168000" y="4104000"/>
-            <a:ext cx="2412000" cy="2412000"/>
+            <a:off x="3409200" y="4104000"/>
+            <a:ext cx="1929600" cy="2412000"/>
           </a:xfrm>
           <a:prstGeom prst="rect">
             <a:avLst/>
@@ -5734,7 +5734,7 @@
                 </a:solidFill>
                 <a:latin typeface="Arial"/>
               </a:rPr>
-              <a:t>Une personne vit la scène : on s’y reconnaît.</a:t>
+              <a:t>Une publication sur deux montre une personne : on s’y reconnaît.</a:t>
             </a:r>
           </a:p>
           <a:p>
@@ -5750,7 +5750,7 @@
                 </a:solidFill>
                 <a:latin typeface="Arial"/>
               </a:rPr>
-              <a:t>Le produit, en médaillon, reste bien visible.</a:t>
+              <a:t>L’autre montre le produit en grand, sur une couleur franche.</a:t>
             </a:r>
           </a:p>
           <a:p>
@@ -5782,7 +5782,7 @@
                 </a:solidFill>
                 <a:latin typeface="Arial"/>
               </a:rPr>
-              <a:t>Photos d’illustration : à remplacer par vos clients et vos produits (avec leur accord).</a:t>
+              <a:t>Photos de personnes : illustrations à remplacer par vos clients (avec leur accord).</a:t>
             </a:r>
           </a:p>
         </p:txBody>
@@ -6133,8 +6133,8 @@
         </p:blipFill>
         <p:spPr>
           <a:xfrm>
-            <a:off x="432000" y="1471440"/>
-            <a:ext cx="11304000" cy="5049120"/>
+            <a:off x="432000" y="1452600"/>
+            <a:ext cx="11304000" cy="5086800"/>
           </a:xfrm>
           <a:prstGeom prst="rect">
             <a:avLst/>
@@ -6487,8 +6487,8 @@
         </p:blipFill>
         <p:spPr>
           <a:xfrm>
-            <a:off x="432000" y="1471440"/>
-            <a:ext cx="11304000" cy="5049120"/>
+            <a:off x="1184319" y="1440000"/>
+            <a:ext cx="9799361" cy="5112000"/>
           </a:xfrm>
           <a:prstGeom prst="rect">
             <a:avLst/>
@@ -6841,8 +6841,8 @@
         </p:blipFill>
         <p:spPr>
           <a:xfrm>
-            <a:off x="432000" y="1471440"/>
-            <a:ext cx="11304000" cy="5049120"/>
+            <a:off x="1184319" y="1440000"/>
+            <a:ext cx="9799361" cy="5112000"/>
           </a:xfrm>
           <a:prstGeom prst="rect">
             <a:avLst/>
@@ -7549,8 +7549,8 @@
         </p:blipFill>
         <p:spPr>
           <a:xfrm>
-            <a:off x="432000" y="1471440"/>
-            <a:ext cx="11304000" cy="5049120"/>
+            <a:off x="1184319" y="1440000"/>
+            <a:ext cx="9799361" cy="5112000"/>
           </a:xfrm>
           <a:prstGeom prst="rect">
             <a:avLst/>
@@ -7903,8 +7903,8 @@
         </p:blipFill>
         <p:spPr>
           <a:xfrm>
-            <a:off x="432000" y="1471440"/>
-            <a:ext cx="11304000" cy="5049120"/>
+            <a:off x="432000" y="1452600"/>
+            <a:ext cx="11304000" cy="5086800"/>
           </a:xfrm>
           <a:prstGeom prst="rect">
             <a:avLst/>

--- a/tmp-tj/261028_tajplast_audit-reseaux-sociaux_v2.pptx
+++ b/tmp-tj/261028_tajplast_audit-reseaux-sociaux_v2.pptx
@@ -5413,7 +5413,7 @@
                 </a:solidFill>
                 <a:latin typeface="Arial"/>
               </a:rPr>
-              <a:t>Version 3 : un mix de scènes de vie et de produits en grand</a:t>
+              <a:t>Version 3 : scènes de vie et produits en grand</a:t>
             </a:r>
           </a:p>
         </p:txBody>
@@ -5556,8 +5556,8 @@
         </p:blipFill>
         <p:spPr>
           <a:xfrm>
-            <a:off x="576000" y="1512000"/>
-            <a:ext cx="2412000" cy="2412000"/>
+            <a:off x="594000" y="1440000"/>
+            <a:ext cx="2268000" cy="2268000"/>
           </a:xfrm>
           <a:prstGeom prst="rect">
             <a:avLst/>
@@ -5580,8 +5580,8 @@
         </p:blipFill>
         <p:spPr>
           <a:xfrm>
-            <a:off x="3409200" y="1512000"/>
-            <a:ext cx="1929600" cy="2412000"/>
+            <a:off x="3340800" y="1440000"/>
+            <a:ext cx="1814400" cy="2268000"/>
           </a:xfrm>
           <a:prstGeom prst="rect">
             <a:avLst/>
@@ -5604,8 +5604,8 @@
         </p:blipFill>
         <p:spPr>
           <a:xfrm>
-            <a:off x="6001200" y="1512000"/>
-            <a:ext cx="1929600" cy="2412000"/>
+            <a:off x="5860800" y="1440000"/>
+            <a:ext cx="1814400" cy="2268000"/>
           </a:xfrm>
           <a:prstGeom prst="rect">
             <a:avLst/>
@@ -5628,8 +5628,8 @@
         </p:blipFill>
         <p:spPr>
           <a:xfrm>
-            <a:off x="576000" y="4104000"/>
-            <a:ext cx="2412000" cy="2412000"/>
+            <a:off x="594000" y="3816000"/>
+            <a:ext cx="2268000" cy="2268000"/>
           </a:xfrm>
           <a:prstGeom prst="rect">
             <a:avLst/>
@@ -5652,8 +5652,8 @@
         </p:blipFill>
         <p:spPr>
           <a:xfrm>
-            <a:off x="3409200" y="4104000"/>
-            <a:ext cx="1929600" cy="2412000"/>
+            <a:off x="3340800" y="3816000"/>
+            <a:ext cx="1814400" cy="2268000"/>
           </a:xfrm>
           <a:prstGeom prst="rect">
             <a:avLst/>
@@ -5676,8 +5676,8 @@
         </p:blipFill>
         <p:spPr>
           <a:xfrm>
-            <a:off x="5760000" y="4104000"/>
-            <a:ext cx="2412000" cy="2412000"/>
+            <a:off x="5634000" y="3816000"/>
+            <a:ext cx="2268000" cy="2268000"/>
           </a:xfrm>
           <a:prstGeom prst="rect">
             <a:avLst/>
@@ -6133,8 +6133,8 @@
         </p:blipFill>
         <p:spPr>
           <a:xfrm>
-            <a:off x="432000" y="1452600"/>
-            <a:ext cx="11304000" cy="5086800"/>
+            <a:off x="844000" y="1404000"/>
+            <a:ext cx="10480000" cy="4716000"/>
           </a:xfrm>
           <a:prstGeom prst="rect">
             <a:avLst/>
@@ -6487,8 +6487,8 @@
         </p:blipFill>
         <p:spPr>
           <a:xfrm>
-            <a:off x="1184319" y="1440000"/>
-            <a:ext cx="9799361" cy="5112000"/>
+            <a:off x="1563872" y="1404000"/>
+            <a:ext cx="9040255" cy="4716000"/>
           </a:xfrm>
           <a:prstGeom prst="rect">
             <a:avLst/>
@@ -6841,8 +6841,8 @@
         </p:blipFill>
         <p:spPr>
           <a:xfrm>
-            <a:off x="1184319" y="1440000"/>
-            <a:ext cx="9799361" cy="5112000"/>
+            <a:off x="1563872" y="1404000"/>
+            <a:ext cx="9040255" cy="4716000"/>
           </a:xfrm>
           <a:prstGeom prst="rect">
             <a:avLst/>
@@ -7195,8 +7195,8 @@
         </p:blipFill>
         <p:spPr>
           <a:xfrm>
-            <a:off x="432000" y="1471440"/>
-            <a:ext cx="11304000" cy="5049120"/>
+            <a:off x="804896" y="1404000"/>
+            <a:ext cx="10558208" cy="4716000"/>
           </a:xfrm>
           <a:prstGeom prst="rect">
             <a:avLst/>
@@ -7549,8 +7549,8 @@
         </p:blipFill>
         <p:spPr>
           <a:xfrm>
-            <a:off x="1184319" y="1440000"/>
-            <a:ext cx="9799361" cy="5112000"/>
+            <a:off x="1563872" y="1404000"/>
+            <a:ext cx="9040255" cy="4716000"/>
           </a:xfrm>
           <a:prstGeom prst="rect">
             <a:avLst/>
@@ -7903,8 +7903,8 @@
         </p:blipFill>
         <p:spPr>
           <a:xfrm>
-            <a:off x="432000" y="1452600"/>
-            <a:ext cx="11304000" cy="5086800"/>
+            <a:off x="844000" y="1404000"/>
+            <a:ext cx="10480000" cy="4716000"/>
           </a:xfrm>
           <a:prstGeom prst="rect">
             <a:avLst/>

--- a/tmp-tj/261028_tajplast_audit-reseaux-sociaux_v2.pptx
+++ b/tmp-tj/261028_tajplast_audit-reseaux-sociaux_v2.pptx
@@ -3828,8 +3828,8 @@
         </p:nvSpPr>
         <p:spPr>
           <a:xfrm>
-            <a:off x="648000" y="4680000"/>
-            <a:ext cx="1080000" cy="288000"/>
+            <a:off x="648000" y="4716000"/>
+            <a:ext cx="792000" cy="288000"/>
           </a:xfrm>
           <a:prstGeom prst="rect">
             <a:avLst/>
@@ -3867,8 +3867,8 @@
         </p:nvSpPr>
         <p:spPr>
           <a:xfrm>
-            <a:off x="1440000" y="4572000"/>
-            <a:ext cx="540000" cy="540000"/>
+            <a:off x="1440000" y="4500000"/>
+            <a:ext cx="720000" cy="720000"/>
           </a:xfrm>
           <a:prstGeom prst="ellipse">
             <a:avLst/>
@@ -3907,7 +3907,7 @@
       </p:sp>
       <p:pic>
         <p:nvPicPr>
-          <p:cNvPr id="19" name="Picture 18" descr="logo_plastica.jpg"/>
+          <p:cNvPr id="19" name="Picture 18" descr="logo2_plastica.jpg"/>
           <p:cNvPicPr>
             <a:picLocks noChangeAspect="1"/>
           </p:cNvPicPr>
@@ -3921,8 +3921,8 @@
         </p:blipFill>
         <p:spPr>
           <a:xfrm>
-            <a:off x="1494000" y="4626000"/>
-            <a:ext cx="432000" cy="432000"/>
+            <a:off x="1468800" y="4528800"/>
+            <a:ext cx="662400" cy="662400"/>
           </a:xfrm>
           <a:prstGeom prst="ellipse">
             <a:avLst/>
@@ -3937,8 +3937,8 @@
         </p:nvSpPr>
         <p:spPr>
           <a:xfrm>
-            <a:off x="2124000" y="4572000"/>
-            <a:ext cx="540000" cy="540000"/>
+            <a:off x="2304000" y="4500000"/>
+            <a:ext cx="720000" cy="720000"/>
           </a:xfrm>
           <a:prstGeom prst="ellipse">
             <a:avLst/>
@@ -3977,7 +3977,7 @@
       </p:sp>
       <p:pic>
         <p:nvPicPr>
-          <p:cNvPr id="21" name="Picture 20" descr="logo_metaplast.jpg"/>
+          <p:cNvPr id="21" name="Picture 20" descr="logo2_metaplast.jpg"/>
           <p:cNvPicPr>
             <a:picLocks noChangeAspect="1"/>
           </p:cNvPicPr>
@@ -3991,8 +3991,8 @@
         </p:blipFill>
         <p:spPr>
           <a:xfrm>
-            <a:off x="2178000" y="4626000"/>
-            <a:ext cx="432000" cy="432000"/>
+            <a:off x="2332800" y="4528800"/>
+            <a:ext cx="662400" cy="662400"/>
           </a:xfrm>
           <a:prstGeom prst="ellipse">
             <a:avLst/>
@@ -19979,7 +19979,7 @@
       </p:sp>
       <p:pic>
         <p:nvPicPr>
-          <p:cNvPr id="13" name="Picture 12" descr="logo_taj.jpg"/>
+          <p:cNvPr id="13" name="Picture 12" descr="logo2_taj.jpg"/>
           <p:cNvPicPr>
             <a:picLocks noChangeAspect="1"/>
           </p:cNvPicPr>
@@ -19993,8 +19993,8 @@
         </p:blipFill>
         <p:spPr>
           <a:xfrm>
-            <a:off x="1836000" y="1998000"/>
-            <a:ext cx="1008000" cy="1008000"/>
+            <a:off x="1760400" y="1922400"/>
+            <a:ext cx="1159200" cy="1159200"/>
           </a:xfrm>
           <a:prstGeom prst="ellipse">
             <a:avLst/>
@@ -20445,7 +20445,7 @@
       </p:sp>
       <p:pic>
         <p:nvPicPr>
-          <p:cNvPr id="26" name="Picture 25" descr="logo_plastica.jpg"/>
+          <p:cNvPr id="26" name="Picture 25" descr="logo2_plastica.jpg"/>
           <p:cNvPicPr>
             <a:picLocks noChangeAspect="1"/>
           </p:cNvPicPr>
@@ -20459,8 +20459,8 @@
         </p:blipFill>
         <p:spPr>
           <a:xfrm>
-            <a:off x="5580000" y="1998000"/>
-            <a:ext cx="1008000" cy="1008000"/>
+            <a:off x="5504400" y="1922400"/>
+            <a:ext cx="1159200" cy="1159200"/>
           </a:xfrm>
           <a:prstGeom prst="ellipse">
             <a:avLst/>
@@ -20911,7 +20911,7 @@
       </p:sp>
       <p:pic>
         <p:nvPicPr>
-          <p:cNvPr id="39" name="Picture 38" descr="logo_metaplast.jpg"/>
+          <p:cNvPr id="39" name="Picture 38" descr="logo2_metaplast.jpg"/>
           <p:cNvPicPr>
             <a:picLocks noChangeAspect="1"/>
           </p:cNvPicPr>
@@ -20925,8 +20925,8 @@
         </p:blipFill>
         <p:spPr>
           <a:xfrm>
-            <a:off x="9324000" y="1998000"/>
-            <a:ext cx="1008000" cy="1008000"/>
+            <a:off x="9248400" y="1922400"/>
+            <a:ext cx="1159200" cy="1159200"/>
           </a:xfrm>
           <a:prstGeom prst="ellipse">
             <a:avLst/>
@@ -22771,7 +22771,7 @@
         </p:nvGraphicFramePr>
         <p:xfrm>
           <a:off x="576000" y="1584000"/>
-          <a:ext cx="5400000" cy="3456000"/>
+          <a:ext cx="5400000" cy="4536000"/>
         </p:xfrm>
         <a:graphic>
           <a:graphicData uri="http://schemas.openxmlformats.org/drawingml/2006/chart">
@@ -22787,8 +22787,8 @@
         </p:nvSpPr>
         <p:spPr>
           <a:xfrm>
-            <a:off x="936000" y="5148000"/>
-            <a:ext cx="864000" cy="864000"/>
+            <a:off x="8442000" y="1548000"/>
+            <a:ext cx="792000" cy="792000"/>
           </a:xfrm>
           <a:prstGeom prst="ellipse">
             <a:avLst/>
@@ -22827,7 +22827,7 @@
       </p:sp>
       <p:pic>
         <p:nvPicPr>
-          <p:cNvPr id="12" name="Picture 11" descr="logo_taj.jpg"/>
+          <p:cNvPr id="12" name="Picture 11" descr="logo2_taj.jpg"/>
           <p:cNvPicPr>
             <a:picLocks noChangeAspect="1"/>
           </p:cNvPicPr>
@@ -22841,8 +22841,8 @@
         </p:blipFill>
         <p:spPr>
           <a:xfrm>
-            <a:off x="1022400" y="5234400"/>
-            <a:ext cx="691200" cy="691200"/>
+            <a:off x="8473680" y="1579680"/>
+            <a:ext cx="728640" cy="728640"/>
           </a:xfrm>
           <a:prstGeom prst="ellipse">
             <a:avLst/>
@@ -22851,53 +22851,14 @@
       </p:pic>
       <p:sp>
         <p:nvSpPr>
-          <p:cNvPr id="13" name="TextBox 12"/>
-          <p:cNvSpPr txBox="1"/>
-          <p:nvPr/>
-        </p:nvSpPr>
-        <p:spPr>
-          <a:xfrm>
-            <a:off x="503999" y="6030000"/>
-            <a:ext cx="1728000" cy="251999"/>
-          </a:xfrm>
-          <a:prstGeom prst="rect">
-            <a:avLst/>
-          </a:prstGeom>
-          <a:noFill/>
-        </p:spPr>
-        <p:txBody>
-          <a:bodyPr wrap="square" lIns="36000" rIns="36000" tIns="18000" bIns="18000" anchor="t">
-            <a:spAutoFit/>
-          </a:bodyPr>
-          <a:lstStyle/>
-          <a:p>
-            <a:pPr algn="ctr">
-              <a:lnSpc>
-                <a:spcPct val="110000"/>
-              </a:lnSpc>
-            </a:pPr>
-            <a:r>
-              <a:rPr sz="1050" b="1">
-                <a:solidFill>
-                  <a:srgbClr val="111111"/>
-                </a:solidFill>
-                <a:latin typeface="Arial"/>
-              </a:rPr>
-              <a:t>TAJ PLAST</a:t>
-            </a:r>
-          </a:p>
-        </p:txBody>
-      </p:sp>
-      <p:sp>
-        <p:nvSpPr>
-          <p:cNvPr id="14" name="Oval 13"/>
+          <p:cNvPr id="13" name="Oval 12"/>
           <p:cNvSpPr/>
           <p:nvPr/>
         </p:nvSpPr>
         <p:spPr>
           <a:xfrm>
-            <a:off x="2664000" y="5148000"/>
-            <a:ext cx="864000" cy="864000"/>
+            <a:off x="9558000" y="1548000"/>
+            <a:ext cx="792000" cy="792000"/>
           </a:xfrm>
           <a:prstGeom prst="ellipse">
             <a:avLst/>
@@ -22936,7 +22897,7 @@
       </p:sp>
       <p:pic>
         <p:nvPicPr>
-          <p:cNvPr id="15" name="Picture 14" descr="logo_plastica.jpg"/>
+          <p:cNvPr id="14" name="Picture 13" descr="logo2_plastica.jpg"/>
           <p:cNvPicPr>
             <a:picLocks noChangeAspect="1"/>
           </p:cNvPicPr>
@@ -22950,8 +22911,8 @@
         </p:blipFill>
         <p:spPr>
           <a:xfrm>
-            <a:off x="2750400" y="5234400"/>
-            <a:ext cx="691200" cy="691200"/>
+            <a:off x="9589680" y="1579680"/>
+            <a:ext cx="728640" cy="728640"/>
           </a:xfrm>
           <a:prstGeom prst="ellipse">
             <a:avLst/>
@@ -22960,53 +22921,14 @@
       </p:pic>
       <p:sp>
         <p:nvSpPr>
-          <p:cNvPr id="16" name="TextBox 15"/>
-          <p:cNvSpPr txBox="1"/>
-          <p:nvPr/>
-        </p:nvSpPr>
-        <p:spPr>
-          <a:xfrm>
-            <a:off x="2231999" y="6030000"/>
-            <a:ext cx="1728000" cy="251999"/>
-          </a:xfrm>
-          <a:prstGeom prst="rect">
-            <a:avLst/>
-          </a:prstGeom>
-          <a:noFill/>
-        </p:spPr>
-        <p:txBody>
-          <a:bodyPr wrap="square" lIns="36000" rIns="36000" tIns="18000" bIns="18000" anchor="t">
-            <a:spAutoFit/>
-          </a:bodyPr>
-          <a:lstStyle/>
-          <a:p>
-            <a:pPr algn="ctr">
-              <a:lnSpc>
-                <a:spcPct val="110000"/>
-              </a:lnSpc>
-            </a:pPr>
-            <a:r>
-              <a:rPr sz="1050" b="1">
-                <a:solidFill>
-                  <a:srgbClr val="111111"/>
-                </a:solidFill>
-                <a:latin typeface="Arial"/>
-              </a:rPr>
-              <a:t>Plastica CI</a:t>
-            </a:r>
-          </a:p>
-        </p:txBody>
-      </p:sp>
-      <p:sp>
-        <p:nvSpPr>
-          <p:cNvPr id="17" name="Oval 16"/>
+          <p:cNvPr id="15" name="Oval 14"/>
           <p:cNvSpPr/>
           <p:nvPr/>
         </p:nvSpPr>
         <p:spPr>
           <a:xfrm>
-            <a:off x="4392000" y="5148000"/>
-            <a:ext cx="864000" cy="864000"/>
+            <a:off x="10674000" y="1548000"/>
+            <a:ext cx="792000" cy="792000"/>
           </a:xfrm>
           <a:prstGeom prst="ellipse">
             <a:avLst/>
@@ -23045,7 +22967,7 @@
       </p:sp>
       <p:pic>
         <p:nvPicPr>
-          <p:cNvPr id="18" name="Picture 17" descr="logo_metaplast.jpg"/>
+          <p:cNvPr id="16" name="Picture 15" descr="logo2_metaplast.jpg"/>
           <p:cNvPicPr>
             <a:picLocks noChangeAspect="1"/>
           </p:cNvPicPr>
@@ -23059,64 +22981,25 @@
         </p:blipFill>
         <p:spPr>
           <a:xfrm>
-            <a:off x="4478400" y="5234400"/>
-            <a:ext cx="691200" cy="691200"/>
+            <a:off x="10705680" y="1579680"/>
+            <a:ext cx="728640" cy="728640"/>
           </a:xfrm>
           <a:prstGeom prst="ellipse">
             <a:avLst/>
           </a:prstGeom>
         </p:spPr>
       </p:pic>
-      <p:sp>
-        <p:nvSpPr>
-          <p:cNvPr id="19" name="TextBox 18"/>
-          <p:cNvSpPr txBox="1"/>
-          <p:nvPr/>
-        </p:nvSpPr>
-        <p:spPr>
-          <a:xfrm>
-            <a:off x="3959999" y="6030000"/>
-            <a:ext cx="1728000" cy="251999"/>
-          </a:xfrm>
-          <a:prstGeom prst="rect">
-            <a:avLst/>
-          </a:prstGeom>
-          <a:noFill/>
-        </p:spPr>
-        <p:txBody>
-          <a:bodyPr wrap="square" lIns="36000" rIns="36000" tIns="18000" bIns="18000" anchor="t">
-            <a:spAutoFit/>
-          </a:bodyPr>
-          <a:lstStyle/>
-          <a:p>
-            <a:pPr algn="ctr">
-              <a:lnSpc>
-                <a:spcPct val="110000"/>
-              </a:lnSpc>
-            </a:pPr>
-            <a:r>
-              <a:rPr sz="1050" b="1">
-                <a:solidFill>
-                  <a:srgbClr val="111111"/>
-                </a:solidFill>
-                <a:latin typeface="Arial"/>
-              </a:rPr>
-              <a:t>Metaplast CI</a:t>
-            </a:r>
-          </a:p>
-        </p:txBody>
-      </p:sp>
       <p:graphicFrame>
         <p:nvGraphicFramePr>
-          <p:cNvPr id="20" name="Table 19"/>
+          <p:cNvPr id="17" name="Table 16"/>
           <p:cNvGraphicFramePr>
             <a:graphicFrameLocks noGrp="1"/>
           </p:cNvGraphicFramePr>
           <p:nvPr/>
         </p:nvGraphicFramePr>
         <p:xfrm>
-          <a:off x="6263999" y="1655999"/>
-          <a:ext cx="5363999" cy="3780000"/>
+          <a:off x="6263999" y="2448000"/>
+          <a:ext cx="5363999" cy="3024000"/>
         </p:xfrm>
         <a:graphic>
           <a:graphicData uri="http://schemas.openxmlformats.org/drawingml/2006/table">
@@ -23130,7 +23013,7 @@
                 <a:gridCol w="1116000"/>
                 <a:gridCol w="1116000"/>
               </a:tblGrid>
-              <a:tr h="540000">
+              <a:tr h="432000">
                 <a:tc>
                   <a:txBody>
                     <a:bodyPr/>
@@ -23222,7 +23105,7 @@
                   </a:tcPr>
                 </a:tc>
               </a:tr>
-              <a:tr h="540000">
+              <a:tr h="432000">
                 <a:tc>
                   <a:txBody>
                     <a:bodyPr/>
@@ -23316,7 +23199,7 @@
                   </a:tcPr>
                 </a:tc>
               </a:tr>
-              <a:tr h="540000">
+              <a:tr h="432000">
                 <a:tc>
                   <a:txBody>
                     <a:bodyPr/>
@@ -23410,7 +23293,7 @@
                   </a:tcPr>
                 </a:tc>
               </a:tr>
-              <a:tr h="540000">
+              <a:tr h="432000">
                 <a:tc>
                   <a:txBody>
                     <a:bodyPr/>
@@ -23504,7 +23387,7 @@
                   </a:tcPr>
                 </a:tc>
               </a:tr>
-              <a:tr h="540000">
+              <a:tr h="432000">
                 <a:tc>
                   <a:txBody>
                     <a:bodyPr/>
@@ -23598,7 +23481,7 @@
                   </a:tcPr>
                 </a:tc>
               </a:tr>
-              <a:tr h="540000">
+              <a:tr h="432000">
                 <a:tc>
                   <a:txBody>
                     <a:bodyPr/>
@@ -23692,7 +23575,7 @@
                   </a:tcPr>
                 </a:tc>
               </a:tr>
-              <a:tr h="540000">
+              <a:tr h="432000">
                 <a:tc>
                   <a:txBody>
                     <a:bodyPr/>
@@ -23792,13 +23675,13 @@
       </p:graphicFrame>
       <p:sp>
         <p:nvSpPr>
-          <p:cNvPr id="21" name="TextBox 20"/>
+          <p:cNvPr id="18" name="TextBox 17"/>
           <p:cNvSpPr txBox="1"/>
           <p:nvPr/>
         </p:nvSpPr>
         <p:spPr>
           <a:xfrm>
-            <a:off x="6263999" y="5580000"/>
+            <a:off x="6263999" y="5760000"/>
             <a:ext cx="5364000" cy="503999"/>
           </a:xfrm>
           <a:prstGeom prst="rect">
@@ -24278,7 +24161,7 @@
       </p:sp>
       <p:pic>
         <p:nvPicPr>
-          <p:cNvPr id="13" name="Picture 12" descr="logo_metaplast.jpg"/>
+          <p:cNvPr id="13" name="Picture 12" descr="logo2_metaplast.jpg"/>
           <p:cNvPicPr>
             <a:picLocks noChangeAspect="1"/>
           </p:cNvPicPr>
@@ -24292,8 +24175,8 @@
         </p:blipFill>
         <p:spPr>
           <a:xfrm>
-            <a:off x="792000" y="4067999"/>
-            <a:ext cx="288000" cy="288000"/>
+            <a:off x="770400" y="4046399"/>
+            <a:ext cx="331200" cy="331200"/>
           </a:xfrm>
           <a:prstGeom prst="ellipse">
             <a:avLst/>
@@ -24686,7 +24569,7 @@
       </p:sp>
       <p:pic>
         <p:nvPicPr>
-          <p:cNvPr id="25" name="Picture 24" descr="logo_metaplast.jpg"/>
+          <p:cNvPr id="25" name="Picture 24" descr="logo2_metaplast.jpg"/>
           <p:cNvPicPr>
             <a:picLocks noChangeAspect="1"/>
           </p:cNvPicPr>
@@ -24700,8 +24583,8 @@
         </p:blipFill>
         <p:spPr>
           <a:xfrm>
-            <a:off x="4536000" y="4067999"/>
-            <a:ext cx="288000" cy="288000"/>
+            <a:off x="4514400" y="4046399"/>
+            <a:ext cx="331200" cy="331200"/>
           </a:xfrm>
           <a:prstGeom prst="ellipse">
             <a:avLst/>
@@ -25094,7 +24977,7 @@
       </p:sp>
       <p:pic>
         <p:nvPicPr>
-          <p:cNvPr id="37" name="Picture 36" descr="logo_plastica.jpg"/>
+          <p:cNvPr id="37" name="Picture 36" descr="logo2_plastica.jpg"/>
           <p:cNvPicPr>
             <a:picLocks noChangeAspect="1"/>
           </p:cNvPicPr>
@@ -25108,8 +24991,8 @@
         </p:blipFill>
         <p:spPr>
           <a:xfrm>
-            <a:off x="8280000" y="4067999"/>
-            <a:ext cx="288000" cy="288000"/>
+            <a:off x="8258400" y="4046399"/>
+            <a:ext cx="331200" cy="331200"/>
           </a:xfrm>
           <a:prstGeom prst="ellipse">
             <a:avLst/>
